--- a/Submission_files/PravasiShram_AI_NavaSankalp_Digital_Shram_Sankalp_2026.pptx
+++ b/Submission_files/PravasiShram_AI_NavaSankalp_Digital_Shram_Sankalp_2026.pptx
@@ -4142,7 +4142,7 @@
         <p:spPr>
           <a:xfrm>
             <a:off x="8311896" y="2330899"/>
-            <a:ext cx="3108960" cy="3960058"/>
+            <a:ext cx="3108960" cy="3621504"/>
           </a:xfrm>
           <a:prstGeom prst="rect">
             <a:avLst/>
@@ -4351,27 +4351,14 @@
               <a:rPr lang="en-IN" sz="1200" dirty="0">
                 <a:hlinkClick r:id="rId4"/>
               </a:rPr>
-              <a:t>https://github.com/YashBadgujar15/NavaSankalp-PravasiShram-AI#-</a:t>
+              <a:t>https://</a:t>
             </a:r>
             <a:r>
               <a:rPr lang="en-IN" sz="1200" dirty="0" smtClean="0">
                 <a:hlinkClick r:id="rId4"/>
               </a:rPr>
-              <a:t>pravasishram-ai</a:t>
-            </a:r>
-            <a:endParaRPr lang="en-IN" sz="1200" dirty="0"/>
-          </a:p>
-          <a:p>
-            <a:pPr>
-              <a:spcBef>
-                <a:spcPts val="1200"/>
-              </a:spcBef>
-              <a:defRPr sz="1050" b="1">
-                <a:solidFill>
-                  <a:srgbClr val="FFFFFF"/>
-                </a:solidFill>
-              </a:defRPr>
-            </a:pPr>
+              <a:t>github.com/YashBadgujar15/NavaSankalp-PravasiShram-AI</a:t>
+            </a:r>
             <a:endParaRPr sz="1200" dirty="0"/>
           </a:p>
           <a:p>
@@ -7165,7 +7152,7 @@
         <p:spPr>
           <a:xfrm>
             <a:off x="1051560" y="5801343"/>
-            <a:ext cx="10241280" cy="807913"/>
+            <a:ext cx="10241280" cy="615553"/>
           </a:xfrm>
           <a:prstGeom prst="rect">
             <a:avLst/>
@@ -7239,54 +7226,14 @@
               <a:t>GITHUB:</a:t>
             </a:r>
             <a:r>
-              <a:rPr lang="en-IN" sz="1250" dirty="0" smtClean="0">
+              <a:rPr lang="en-IN" sz="1250" dirty="0">
                 <a:solidFill>
                   <a:srgbClr val="002060"/>
-                </a:solidFill>
-              </a:rPr>
-              <a:t> </a:t>
-            </a:r>
-            <a:r>
-              <a:rPr lang="en-IN" sz="1250" dirty="0" smtClean="0">
-                <a:solidFill>
-                  <a:srgbClr val="FF0000"/>
                 </a:solidFill>
                 <a:hlinkClick r:id="rId4"/>
               </a:rPr>
               <a:t>https://github.com/YashBadgujar15/NavaSankalp-PravasiShram-AI</a:t>
             </a:r>
-            <a:r>
-              <a:rPr lang="en-IN" sz="1250" dirty="0">
-                <a:solidFill>
-                  <a:srgbClr val="FF0000"/>
-                </a:solidFill>
-                <a:hlinkClick r:id="rId4"/>
-              </a:rPr>
-              <a:t>#-</a:t>
-            </a:r>
-            <a:r>
-              <a:rPr lang="en-IN" sz="1250" dirty="0" smtClean="0">
-                <a:solidFill>
-                  <a:srgbClr val="FF0000"/>
-                </a:solidFill>
-                <a:hlinkClick r:id="rId4"/>
-              </a:rPr>
-              <a:t>pravasishram-ai</a:t>
-            </a:r>
-            <a:endParaRPr lang="en-IN" sz="1250" dirty="0" smtClean="0">
-              <a:solidFill>
-                <a:srgbClr val="FF0000"/>
-              </a:solidFill>
-            </a:endParaRPr>
-          </a:p>
-          <a:p>
-            <a:pPr algn="ctr">
-              <a:defRPr sz="1100" b="1">
-                <a:solidFill>
-                  <a:srgbClr val="FFFFFF"/>
-                </a:solidFill>
-              </a:defRPr>
-            </a:pPr>
             <a:endParaRPr sz="1250" dirty="0"/>
           </a:p>
           <a:p>
